--- a/public/videos/repositories/ranking-widget-hub/ranking-widget-hub-tech-preview.pptx
+++ b/public/videos/repositories/ranking-widget-hub/ranking-widget-hub-tech-preview.pptx
@@ -134,7 +134,7 @@
           <p:cNvPr id="2" name="タイトル 1">
             <a:extLst>
               <a:ext uri="{FF2B5EF4-FFF2-40B4-BE49-F238E27FC236}">
-                <a16:creationId xmlns:a16="http://schemas.microsoft.com/office/drawing/2014/main" id="{FFC5E5E0-2184-748D-94BF-A687246E857A}"/>
+                <a16:creationId xmlns:a16="http://schemas.microsoft.com/office/drawing/2014/main" id="{EE532C4C-71BB-65E6-2675-C0A7583EDE64}"/>
               </a:ext>
             </a:extLst>
           </p:cNvPr>
@@ -171,7 +171,7 @@
           <p:cNvPr id="3" name="字幕 2">
             <a:extLst>
               <a:ext uri="{FF2B5EF4-FFF2-40B4-BE49-F238E27FC236}">
-                <a16:creationId xmlns:a16="http://schemas.microsoft.com/office/drawing/2014/main" id="{FA38F75F-49B9-2602-9B7E-A28B396D699D}"/>
+                <a16:creationId xmlns:a16="http://schemas.microsoft.com/office/drawing/2014/main" id="{05024CF6-3215-F0F4-6A51-81B618D15CC9}"/>
               </a:ext>
             </a:extLst>
           </p:cNvPr>
@@ -241,7 +241,7 @@
           <p:cNvPr id="4" name="日付プレースホルダー 3">
             <a:extLst>
               <a:ext uri="{FF2B5EF4-FFF2-40B4-BE49-F238E27FC236}">
-                <a16:creationId xmlns:a16="http://schemas.microsoft.com/office/drawing/2014/main" id="{84EC27F6-ADEB-F13B-9BE7-23FBE9CA4F0E}"/>
+                <a16:creationId xmlns:a16="http://schemas.microsoft.com/office/drawing/2014/main" id="{2F10B093-238A-CCEF-D367-ED44E3F5B414}"/>
               </a:ext>
             </a:extLst>
           </p:cNvPr>
@@ -257,7 +257,7 @@
           <a:bodyPr/>
           <a:lstStyle/>
           <a:p>
-            <a:fld id="{D5D704FA-7BE9-43FB-A986-D3D708755B41}" type="datetimeFigureOut">
+            <a:fld id="{5F292C0C-33D6-4CA9-8A07-732F13342A7B}" type="datetimeFigureOut">
               <a:rPr kumimoji="1" lang="ja-JP" altLang="en-US" smtClean="0"/>
               <a:t>2026/7/30</a:t>
             </a:fld>
@@ -270,7 +270,7 @@
           <p:cNvPr id="5" name="フッター プレースホルダー 4">
             <a:extLst>
               <a:ext uri="{FF2B5EF4-FFF2-40B4-BE49-F238E27FC236}">
-                <a16:creationId xmlns:a16="http://schemas.microsoft.com/office/drawing/2014/main" id="{A19DB6E1-CD23-A4D4-B62C-55B82A3FA426}"/>
+                <a16:creationId xmlns:a16="http://schemas.microsoft.com/office/drawing/2014/main" id="{04830C6F-7EC7-CBFD-A1ED-9A1312D20A8A}"/>
               </a:ext>
             </a:extLst>
           </p:cNvPr>
@@ -295,7 +295,7 @@
           <p:cNvPr id="6" name="スライド番号プレースホルダー 5">
             <a:extLst>
               <a:ext uri="{FF2B5EF4-FFF2-40B4-BE49-F238E27FC236}">
-                <a16:creationId xmlns:a16="http://schemas.microsoft.com/office/drawing/2014/main" id="{8F523492-53C2-C527-3814-B8E5DF3882A3}"/>
+                <a16:creationId xmlns:a16="http://schemas.microsoft.com/office/drawing/2014/main" id="{C1BF0E3D-B97F-4ABF-0EE6-B2544DC97039}"/>
               </a:ext>
             </a:extLst>
           </p:cNvPr>
@@ -311,7 +311,7 @@
           <a:bodyPr/>
           <a:lstStyle/>
           <a:p>
-            <a:fld id="{C16136AF-B964-45A3-AE70-25FF80B9EE4A}" type="slidenum">
+            <a:fld id="{F79AFA1A-DBCF-4772-8807-12CC9A701676}" type="slidenum">
               <a:rPr kumimoji="1" lang="ja-JP" altLang="en-US" smtClean="0"/>
               <a:t>‹#›</a:t>
             </a:fld>
@@ -322,7 +322,7 @@
     </p:spTree>
     <p:extLst>
       <p:ext uri="{BB962C8B-B14F-4D97-AF65-F5344CB8AC3E}">
-        <p14:creationId xmlns:p14="http://schemas.microsoft.com/office/powerpoint/2010/main" val="1549997722"/>
+        <p14:creationId xmlns:p14="http://schemas.microsoft.com/office/powerpoint/2010/main" val="1159250679"/>
       </p:ext>
     </p:extLst>
   </p:cSld>
@@ -354,7 +354,7 @@
           <p:cNvPr id="2" name="タイトル 1">
             <a:extLst>
               <a:ext uri="{FF2B5EF4-FFF2-40B4-BE49-F238E27FC236}">
-                <a16:creationId xmlns:a16="http://schemas.microsoft.com/office/drawing/2014/main" id="{856E27D0-12B7-7DC6-9128-72787F1D02AC}"/>
+                <a16:creationId xmlns:a16="http://schemas.microsoft.com/office/drawing/2014/main" id="{A184CA45-228E-CDDC-16D3-5A2976F58EA5}"/>
               </a:ext>
             </a:extLst>
           </p:cNvPr>
@@ -382,7 +382,7 @@
           <p:cNvPr id="3" name="縦書きテキスト プレースホルダー 2">
             <a:extLst>
               <a:ext uri="{FF2B5EF4-FFF2-40B4-BE49-F238E27FC236}">
-                <a16:creationId xmlns:a16="http://schemas.microsoft.com/office/drawing/2014/main" id="{8465C6BD-A170-A676-028C-B55470FABC38}"/>
+                <a16:creationId xmlns:a16="http://schemas.microsoft.com/office/drawing/2014/main" id="{1406A103-DDD6-ACDB-9059-CCE2B0291A5E}"/>
               </a:ext>
             </a:extLst>
           </p:cNvPr>
@@ -471,7 +471,7 @@
           <p:cNvPr id="4" name="日付プレースホルダー 3">
             <a:extLst>
               <a:ext uri="{FF2B5EF4-FFF2-40B4-BE49-F238E27FC236}">
-                <a16:creationId xmlns:a16="http://schemas.microsoft.com/office/drawing/2014/main" id="{FD5646A3-43D0-F292-97EF-8258510FA3D7}"/>
+                <a16:creationId xmlns:a16="http://schemas.microsoft.com/office/drawing/2014/main" id="{AADEA7D7-7856-28A5-3BE6-B78B7C9D9E49}"/>
               </a:ext>
             </a:extLst>
           </p:cNvPr>
@@ -487,7 +487,7 @@
           <a:bodyPr/>
           <a:lstStyle/>
           <a:p>
-            <a:fld id="{D5D704FA-7BE9-43FB-A986-D3D708755B41}" type="datetimeFigureOut">
+            <a:fld id="{5F292C0C-33D6-4CA9-8A07-732F13342A7B}" type="datetimeFigureOut">
               <a:rPr kumimoji="1" lang="ja-JP" altLang="en-US" smtClean="0"/>
               <a:t>2026/7/30</a:t>
             </a:fld>
@@ -500,7 +500,7 @@
           <p:cNvPr id="5" name="フッター プレースホルダー 4">
             <a:extLst>
               <a:ext uri="{FF2B5EF4-FFF2-40B4-BE49-F238E27FC236}">
-                <a16:creationId xmlns:a16="http://schemas.microsoft.com/office/drawing/2014/main" id="{702366A9-9FC1-E8AA-2508-E8E20F738B59}"/>
+                <a16:creationId xmlns:a16="http://schemas.microsoft.com/office/drawing/2014/main" id="{DF6A3CF7-D50B-10A6-FC2A-0A0BE204AB51}"/>
               </a:ext>
             </a:extLst>
           </p:cNvPr>
@@ -525,7 +525,7 @@
           <p:cNvPr id="6" name="スライド番号プレースホルダー 5">
             <a:extLst>
               <a:ext uri="{FF2B5EF4-FFF2-40B4-BE49-F238E27FC236}">
-                <a16:creationId xmlns:a16="http://schemas.microsoft.com/office/drawing/2014/main" id="{CF689DA7-0BAD-E3F6-58D2-776872054C48}"/>
+                <a16:creationId xmlns:a16="http://schemas.microsoft.com/office/drawing/2014/main" id="{04097178-3D69-9397-247E-49733D591F2D}"/>
               </a:ext>
             </a:extLst>
           </p:cNvPr>
@@ -541,7 +541,7 @@
           <a:bodyPr/>
           <a:lstStyle/>
           <a:p>
-            <a:fld id="{C16136AF-B964-45A3-AE70-25FF80B9EE4A}" type="slidenum">
+            <a:fld id="{F79AFA1A-DBCF-4772-8807-12CC9A701676}" type="slidenum">
               <a:rPr kumimoji="1" lang="ja-JP" altLang="en-US" smtClean="0"/>
               <a:t>‹#›</a:t>
             </a:fld>
@@ -552,7 +552,7 @@
     </p:spTree>
     <p:extLst>
       <p:ext uri="{BB962C8B-B14F-4D97-AF65-F5344CB8AC3E}">
-        <p14:creationId xmlns:p14="http://schemas.microsoft.com/office/powerpoint/2010/main" val="759960731"/>
+        <p14:creationId xmlns:p14="http://schemas.microsoft.com/office/powerpoint/2010/main" val="112135388"/>
       </p:ext>
     </p:extLst>
   </p:cSld>
@@ -584,7 +584,7 @@
           <p:cNvPr id="2" name="縦書きタイトル 1">
             <a:extLst>
               <a:ext uri="{FF2B5EF4-FFF2-40B4-BE49-F238E27FC236}">
-                <a16:creationId xmlns:a16="http://schemas.microsoft.com/office/drawing/2014/main" id="{24218066-054D-6FD9-A6AB-8480379F2ED4}"/>
+                <a16:creationId xmlns:a16="http://schemas.microsoft.com/office/drawing/2014/main" id="{84DCEB4D-B23C-FD8B-42F8-2E434CE22070}"/>
               </a:ext>
             </a:extLst>
           </p:cNvPr>
@@ -617,7 +617,7 @@
           <p:cNvPr id="3" name="縦書きテキスト プレースホルダー 2">
             <a:extLst>
               <a:ext uri="{FF2B5EF4-FFF2-40B4-BE49-F238E27FC236}">
-                <a16:creationId xmlns:a16="http://schemas.microsoft.com/office/drawing/2014/main" id="{8F568FD8-8C60-D3A7-63C6-440B1900B929}"/>
+                <a16:creationId xmlns:a16="http://schemas.microsoft.com/office/drawing/2014/main" id="{2819720C-B49F-085A-DC12-A1426F518A56}"/>
               </a:ext>
             </a:extLst>
           </p:cNvPr>
@@ -711,7 +711,7 @@
           <p:cNvPr id="4" name="日付プレースホルダー 3">
             <a:extLst>
               <a:ext uri="{FF2B5EF4-FFF2-40B4-BE49-F238E27FC236}">
-                <a16:creationId xmlns:a16="http://schemas.microsoft.com/office/drawing/2014/main" id="{EA8DED9B-3CD6-5DD7-6B78-C8AF9D9F2E6D}"/>
+                <a16:creationId xmlns:a16="http://schemas.microsoft.com/office/drawing/2014/main" id="{23BE10EF-7B0E-E80F-76C0-805CB1F32703}"/>
               </a:ext>
             </a:extLst>
           </p:cNvPr>
@@ -727,7 +727,7 @@
           <a:bodyPr/>
           <a:lstStyle/>
           <a:p>
-            <a:fld id="{D5D704FA-7BE9-43FB-A986-D3D708755B41}" type="datetimeFigureOut">
+            <a:fld id="{5F292C0C-33D6-4CA9-8A07-732F13342A7B}" type="datetimeFigureOut">
               <a:rPr kumimoji="1" lang="ja-JP" altLang="en-US" smtClean="0"/>
               <a:t>2026/7/30</a:t>
             </a:fld>
@@ -740,7 +740,7 @@
           <p:cNvPr id="5" name="フッター プレースホルダー 4">
             <a:extLst>
               <a:ext uri="{FF2B5EF4-FFF2-40B4-BE49-F238E27FC236}">
-                <a16:creationId xmlns:a16="http://schemas.microsoft.com/office/drawing/2014/main" id="{CFD6F0EE-309C-EBAA-1D57-A8A6AD2E93C7}"/>
+                <a16:creationId xmlns:a16="http://schemas.microsoft.com/office/drawing/2014/main" id="{D1C74F27-E513-A449-6DFB-8A4D42271F91}"/>
               </a:ext>
             </a:extLst>
           </p:cNvPr>
@@ -765,7 +765,7 @@
           <p:cNvPr id="6" name="スライド番号プレースホルダー 5">
             <a:extLst>
               <a:ext uri="{FF2B5EF4-FFF2-40B4-BE49-F238E27FC236}">
-                <a16:creationId xmlns:a16="http://schemas.microsoft.com/office/drawing/2014/main" id="{FF2E00E2-4748-4372-9A73-BBE434A1034D}"/>
+                <a16:creationId xmlns:a16="http://schemas.microsoft.com/office/drawing/2014/main" id="{864FD51C-DE2A-41F3-01A2-3EF3030E489C}"/>
               </a:ext>
             </a:extLst>
           </p:cNvPr>
@@ -781,7 +781,7 @@
           <a:bodyPr/>
           <a:lstStyle/>
           <a:p>
-            <a:fld id="{C16136AF-B964-45A3-AE70-25FF80B9EE4A}" type="slidenum">
+            <a:fld id="{F79AFA1A-DBCF-4772-8807-12CC9A701676}" type="slidenum">
               <a:rPr kumimoji="1" lang="ja-JP" altLang="en-US" smtClean="0"/>
               <a:t>‹#›</a:t>
             </a:fld>
@@ -792,7 +792,7 @@
     </p:spTree>
     <p:extLst>
       <p:ext uri="{BB962C8B-B14F-4D97-AF65-F5344CB8AC3E}">
-        <p14:creationId xmlns:p14="http://schemas.microsoft.com/office/powerpoint/2010/main" val="3951597264"/>
+        <p14:creationId xmlns:p14="http://schemas.microsoft.com/office/powerpoint/2010/main" val="2054062869"/>
       </p:ext>
     </p:extLst>
   </p:cSld>
@@ -824,7 +824,7 @@
           <p:cNvPr id="2" name="タイトル 1">
             <a:extLst>
               <a:ext uri="{FF2B5EF4-FFF2-40B4-BE49-F238E27FC236}">
-                <a16:creationId xmlns:a16="http://schemas.microsoft.com/office/drawing/2014/main" id="{8FACF39E-8836-58D6-798D-7F9CA0208FFD}"/>
+                <a16:creationId xmlns:a16="http://schemas.microsoft.com/office/drawing/2014/main" id="{61B13A9D-532F-EF97-0F8A-C93595124CE7}"/>
               </a:ext>
             </a:extLst>
           </p:cNvPr>
@@ -852,7 +852,7 @@
           <p:cNvPr id="3" name="コンテンツ プレースホルダー 2">
             <a:extLst>
               <a:ext uri="{FF2B5EF4-FFF2-40B4-BE49-F238E27FC236}">
-                <a16:creationId xmlns:a16="http://schemas.microsoft.com/office/drawing/2014/main" id="{36EF8CFA-1EEF-D2D9-4836-8D1367BCCA96}"/>
+                <a16:creationId xmlns:a16="http://schemas.microsoft.com/office/drawing/2014/main" id="{F01AA246-8DEC-6075-1552-AE308F2F1F59}"/>
               </a:ext>
             </a:extLst>
           </p:cNvPr>
@@ -941,7 +941,7 @@
           <p:cNvPr id="4" name="日付プレースホルダー 3">
             <a:extLst>
               <a:ext uri="{FF2B5EF4-FFF2-40B4-BE49-F238E27FC236}">
-                <a16:creationId xmlns:a16="http://schemas.microsoft.com/office/drawing/2014/main" id="{01176826-68E6-660A-4232-34ECC059B705}"/>
+                <a16:creationId xmlns:a16="http://schemas.microsoft.com/office/drawing/2014/main" id="{FA616E60-6F38-459E-A133-54C807A60FD4}"/>
               </a:ext>
             </a:extLst>
           </p:cNvPr>
@@ -957,7 +957,7 @@
           <a:bodyPr/>
           <a:lstStyle/>
           <a:p>
-            <a:fld id="{D5D704FA-7BE9-43FB-A986-D3D708755B41}" type="datetimeFigureOut">
+            <a:fld id="{5F292C0C-33D6-4CA9-8A07-732F13342A7B}" type="datetimeFigureOut">
               <a:rPr kumimoji="1" lang="ja-JP" altLang="en-US" smtClean="0"/>
               <a:t>2026/7/30</a:t>
             </a:fld>
@@ -970,7 +970,7 @@
           <p:cNvPr id="5" name="フッター プレースホルダー 4">
             <a:extLst>
               <a:ext uri="{FF2B5EF4-FFF2-40B4-BE49-F238E27FC236}">
-                <a16:creationId xmlns:a16="http://schemas.microsoft.com/office/drawing/2014/main" id="{AD81B4B3-68FD-01D3-7867-2580985E7212}"/>
+                <a16:creationId xmlns:a16="http://schemas.microsoft.com/office/drawing/2014/main" id="{46AB1EC8-34B0-9798-1B2A-065ECD3E31EF}"/>
               </a:ext>
             </a:extLst>
           </p:cNvPr>
@@ -995,7 +995,7 @@
           <p:cNvPr id="6" name="スライド番号プレースホルダー 5">
             <a:extLst>
               <a:ext uri="{FF2B5EF4-FFF2-40B4-BE49-F238E27FC236}">
-                <a16:creationId xmlns:a16="http://schemas.microsoft.com/office/drawing/2014/main" id="{CD8688EA-5CC0-5DFC-A9AA-92E3F5C70B96}"/>
+                <a16:creationId xmlns:a16="http://schemas.microsoft.com/office/drawing/2014/main" id="{7812E3FD-9FD6-79F4-E7FD-83F0B27C7D14}"/>
               </a:ext>
             </a:extLst>
           </p:cNvPr>
@@ -1011,7 +1011,7 @@
           <a:bodyPr/>
           <a:lstStyle/>
           <a:p>
-            <a:fld id="{C16136AF-B964-45A3-AE70-25FF80B9EE4A}" type="slidenum">
+            <a:fld id="{F79AFA1A-DBCF-4772-8807-12CC9A701676}" type="slidenum">
               <a:rPr kumimoji="1" lang="ja-JP" altLang="en-US" smtClean="0"/>
               <a:t>‹#›</a:t>
             </a:fld>
@@ -1022,7 +1022,7 @@
     </p:spTree>
     <p:extLst>
       <p:ext uri="{BB962C8B-B14F-4D97-AF65-F5344CB8AC3E}">
-        <p14:creationId xmlns:p14="http://schemas.microsoft.com/office/powerpoint/2010/main" val="3261827775"/>
+        <p14:creationId xmlns:p14="http://schemas.microsoft.com/office/powerpoint/2010/main" val="3428174480"/>
       </p:ext>
     </p:extLst>
   </p:cSld>
@@ -1054,7 +1054,7 @@
           <p:cNvPr id="2" name="タイトル 1">
             <a:extLst>
               <a:ext uri="{FF2B5EF4-FFF2-40B4-BE49-F238E27FC236}">
-                <a16:creationId xmlns:a16="http://schemas.microsoft.com/office/drawing/2014/main" id="{3054556A-C94E-7026-81C5-5AFA35C9F65A}"/>
+                <a16:creationId xmlns:a16="http://schemas.microsoft.com/office/drawing/2014/main" id="{C1FBED07-F894-5233-ADBC-7A93A18DB6E2}"/>
               </a:ext>
             </a:extLst>
           </p:cNvPr>
@@ -1091,7 +1091,7 @@
           <p:cNvPr id="3" name="テキスト プレースホルダー 2">
             <a:extLst>
               <a:ext uri="{FF2B5EF4-FFF2-40B4-BE49-F238E27FC236}">
-                <a16:creationId xmlns:a16="http://schemas.microsoft.com/office/drawing/2014/main" id="{D209C76A-07F2-E91B-AC54-E8D9EB8B800A}"/>
+                <a16:creationId xmlns:a16="http://schemas.microsoft.com/office/drawing/2014/main" id="{54891531-F18C-2D18-2DB3-FB7120E5C615}"/>
               </a:ext>
             </a:extLst>
           </p:cNvPr>
@@ -1216,7 +1216,7 @@
           <p:cNvPr id="4" name="日付プレースホルダー 3">
             <a:extLst>
               <a:ext uri="{FF2B5EF4-FFF2-40B4-BE49-F238E27FC236}">
-                <a16:creationId xmlns:a16="http://schemas.microsoft.com/office/drawing/2014/main" id="{175E0F23-2092-A0B7-CB81-5C73F8DA8948}"/>
+                <a16:creationId xmlns:a16="http://schemas.microsoft.com/office/drawing/2014/main" id="{780569F2-169A-BD0C-B21D-2746E92B0D44}"/>
               </a:ext>
             </a:extLst>
           </p:cNvPr>
@@ -1232,7 +1232,7 @@
           <a:bodyPr/>
           <a:lstStyle/>
           <a:p>
-            <a:fld id="{D5D704FA-7BE9-43FB-A986-D3D708755B41}" type="datetimeFigureOut">
+            <a:fld id="{5F292C0C-33D6-4CA9-8A07-732F13342A7B}" type="datetimeFigureOut">
               <a:rPr kumimoji="1" lang="ja-JP" altLang="en-US" smtClean="0"/>
               <a:t>2026/7/30</a:t>
             </a:fld>
@@ -1245,7 +1245,7 @@
           <p:cNvPr id="5" name="フッター プレースホルダー 4">
             <a:extLst>
               <a:ext uri="{FF2B5EF4-FFF2-40B4-BE49-F238E27FC236}">
-                <a16:creationId xmlns:a16="http://schemas.microsoft.com/office/drawing/2014/main" id="{291C3110-FC94-DFE7-34A9-6836DD5B3752}"/>
+                <a16:creationId xmlns:a16="http://schemas.microsoft.com/office/drawing/2014/main" id="{B84AD37D-50A1-A24E-D8A6-B8C3DFE6A25D}"/>
               </a:ext>
             </a:extLst>
           </p:cNvPr>
@@ -1270,7 +1270,7 @@
           <p:cNvPr id="6" name="スライド番号プレースホルダー 5">
             <a:extLst>
               <a:ext uri="{FF2B5EF4-FFF2-40B4-BE49-F238E27FC236}">
-                <a16:creationId xmlns:a16="http://schemas.microsoft.com/office/drawing/2014/main" id="{072E1A1B-2F97-6865-34D7-DB49935694F6}"/>
+                <a16:creationId xmlns:a16="http://schemas.microsoft.com/office/drawing/2014/main" id="{7628F833-171B-952E-4266-808D870765ED}"/>
               </a:ext>
             </a:extLst>
           </p:cNvPr>
@@ -1286,7 +1286,7 @@
           <a:bodyPr/>
           <a:lstStyle/>
           <a:p>
-            <a:fld id="{C16136AF-B964-45A3-AE70-25FF80B9EE4A}" type="slidenum">
+            <a:fld id="{F79AFA1A-DBCF-4772-8807-12CC9A701676}" type="slidenum">
               <a:rPr kumimoji="1" lang="ja-JP" altLang="en-US" smtClean="0"/>
               <a:t>‹#›</a:t>
             </a:fld>
@@ -1297,7 +1297,7 @@
     </p:spTree>
     <p:extLst>
       <p:ext uri="{BB962C8B-B14F-4D97-AF65-F5344CB8AC3E}">
-        <p14:creationId xmlns:p14="http://schemas.microsoft.com/office/powerpoint/2010/main" val="11097682"/>
+        <p14:creationId xmlns:p14="http://schemas.microsoft.com/office/powerpoint/2010/main" val="2639360022"/>
       </p:ext>
     </p:extLst>
   </p:cSld>
@@ -1329,7 +1329,7 @@
           <p:cNvPr id="2" name="タイトル 1">
             <a:extLst>
               <a:ext uri="{FF2B5EF4-FFF2-40B4-BE49-F238E27FC236}">
-                <a16:creationId xmlns:a16="http://schemas.microsoft.com/office/drawing/2014/main" id="{9B864FF6-1B85-5646-15BE-E65DA3F2F7A4}"/>
+                <a16:creationId xmlns:a16="http://schemas.microsoft.com/office/drawing/2014/main" id="{9547B141-19C2-D433-002F-43308FD72DC7}"/>
               </a:ext>
             </a:extLst>
           </p:cNvPr>
@@ -1357,7 +1357,7 @@
           <p:cNvPr id="3" name="コンテンツ プレースホルダー 2">
             <a:extLst>
               <a:ext uri="{FF2B5EF4-FFF2-40B4-BE49-F238E27FC236}">
-                <a16:creationId xmlns:a16="http://schemas.microsoft.com/office/drawing/2014/main" id="{18CC4EB9-0C6F-E263-12D9-846CAC1A4BA6}"/>
+                <a16:creationId xmlns:a16="http://schemas.microsoft.com/office/drawing/2014/main" id="{2DBF0FBF-EFAF-1B63-7547-1C5AEE760DAA}"/>
               </a:ext>
             </a:extLst>
           </p:cNvPr>
@@ -1451,7 +1451,7 @@
           <p:cNvPr id="4" name="コンテンツ プレースホルダー 3">
             <a:extLst>
               <a:ext uri="{FF2B5EF4-FFF2-40B4-BE49-F238E27FC236}">
-                <a16:creationId xmlns:a16="http://schemas.microsoft.com/office/drawing/2014/main" id="{E0ADA2D7-2473-710F-65ED-91C6237CDEFC}"/>
+                <a16:creationId xmlns:a16="http://schemas.microsoft.com/office/drawing/2014/main" id="{85A4E9C3-95E1-436B-0D60-2B65A609973D}"/>
               </a:ext>
             </a:extLst>
           </p:cNvPr>
@@ -1545,7 +1545,7 @@
           <p:cNvPr id="5" name="日付プレースホルダー 4">
             <a:extLst>
               <a:ext uri="{FF2B5EF4-FFF2-40B4-BE49-F238E27FC236}">
-                <a16:creationId xmlns:a16="http://schemas.microsoft.com/office/drawing/2014/main" id="{E6F9CEC2-1554-3B1A-E1D8-A2E41CAE7793}"/>
+                <a16:creationId xmlns:a16="http://schemas.microsoft.com/office/drawing/2014/main" id="{B07A86BC-86C2-A3EC-1AA3-595950DE86AB}"/>
               </a:ext>
             </a:extLst>
           </p:cNvPr>
@@ -1561,7 +1561,7 @@
           <a:bodyPr/>
           <a:lstStyle/>
           <a:p>
-            <a:fld id="{D5D704FA-7BE9-43FB-A986-D3D708755B41}" type="datetimeFigureOut">
+            <a:fld id="{5F292C0C-33D6-4CA9-8A07-732F13342A7B}" type="datetimeFigureOut">
               <a:rPr kumimoji="1" lang="ja-JP" altLang="en-US" smtClean="0"/>
               <a:t>2026/7/30</a:t>
             </a:fld>
@@ -1574,7 +1574,7 @@
           <p:cNvPr id="6" name="フッター プレースホルダー 5">
             <a:extLst>
               <a:ext uri="{FF2B5EF4-FFF2-40B4-BE49-F238E27FC236}">
-                <a16:creationId xmlns:a16="http://schemas.microsoft.com/office/drawing/2014/main" id="{492C4BEC-30AC-D48B-35B1-B130F9A61BDB}"/>
+                <a16:creationId xmlns:a16="http://schemas.microsoft.com/office/drawing/2014/main" id="{D967058D-A648-9598-3021-3B048E1902A1}"/>
               </a:ext>
             </a:extLst>
           </p:cNvPr>
@@ -1599,7 +1599,7 @@
           <p:cNvPr id="7" name="スライド番号プレースホルダー 6">
             <a:extLst>
               <a:ext uri="{FF2B5EF4-FFF2-40B4-BE49-F238E27FC236}">
-                <a16:creationId xmlns:a16="http://schemas.microsoft.com/office/drawing/2014/main" id="{EC62D3B6-9314-983D-45AA-997ADE64BFB3}"/>
+                <a16:creationId xmlns:a16="http://schemas.microsoft.com/office/drawing/2014/main" id="{3D2FECAB-4AFA-07F0-91A4-21C521AF2EC7}"/>
               </a:ext>
             </a:extLst>
           </p:cNvPr>
@@ -1615,7 +1615,7 @@
           <a:bodyPr/>
           <a:lstStyle/>
           <a:p>
-            <a:fld id="{C16136AF-B964-45A3-AE70-25FF80B9EE4A}" type="slidenum">
+            <a:fld id="{F79AFA1A-DBCF-4772-8807-12CC9A701676}" type="slidenum">
               <a:rPr kumimoji="1" lang="ja-JP" altLang="en-US" smtClean="0"/>
               <a:t>‹#›</a:t>
             </a:fld>
@@ -1626,7 +1626,7 @@
     </p:spTree>
     <p:extLst>
       <p:ext uri="{BB962C8B-B14F-4D97-AF65-F5344CB8AC3E}">
-        <p14:creationId xmlns:p14="http://schemas.microsoft.com/office/powerpoint/2010/main" val="2721701716"/>
+        <p14:creationId xmlns:p14="http://schemas.microsoft.com/office/powerpoint/2010/main" val="977345203"/>
       </p:ext>
     </p:extLst>
   </p:cSld>
@@ -1658,7 +1658,7 @@
           <p:cNvPr id="2" name="タイトル 1">
             <a:extLst>
               <a:ext uri="{FF2B5EF4-FFF2-40B4-BE49-F238E27FC236}">
-                <a16:creationId xmlns:a16="http://schemas.microsoft.com/office/drawing/2014/main" id="{C5B73979-95D2-764E-9B07-85C66B554177}"/>
+                <a16:creationId xmlns:a16="http://schemas.microsoft.com/office/drawing/2014/main" id="{233DA9D6-F4EF-3F60-C788-BF5B3481A98E}"/>
               </a:ext>
             </a:extLst>
           </p:cNvPr>
@@ -1691,7 +1691,7 @@
           <p:cNvPr id="3" name="テキスト プレースホルダー 2">
             <a:extLst>
               <a:ext uri="{FF2B5EF4-FFF2-40B4-BE49-F238E27FC236}">
-                <a16:creationId xmlns:a16="http://schemas.microsoft.com/office/drawing/2014/main" id="{D5B8EE9F-30AA-A990-2B8C-179FC0F59C49}"/>
+                <a16:creationId xmlns:a16="http://schemas.microsoft.com/office/drawing/2014/main" id="{73221A6D-B87B-C4FC-26F7-8B43682B3045}"/>
               </a:ext>
             </a:extLst>
           </p:cNvPr>
@@ -1762,7 +1762,7 @@
           <p:cNvPr id="4" name="コンテンツ プレースホルダー 3">
             <a:extLst>
               <a:ext uri="{FF2B5EF4-FFF2-40B4-BE49-F238E27FC236}">
-                <a16:creationId xmlns:a16="http://schemas.microsoft.com/office/drawing/2014/main" id="{EEB96E5B-56B4-780E-F76F-55A30AB205E9}"/>
+                <a16:creationId xmlns:a16="http://schemas.microsoft.com/office/drawing/2014/main" id="{177421D6-6208-27D3-9D2C-DDA5A866CE83}"/>
               </a:ext>
             </a:extLst>
           </p:cNvPr>
@@ -1856,7 +1856,7 @@
           <p:cNvPr id="5" name="テキスト プレースホルダー 4">
             <a:extLst>
               <a:ext uri="{FF2B5EF4-FFF2-40B4-BE49-F238E27FC236}">
-                <a16:creationId xmlns:a16="http://schemas.microsoft.com/office/drawing/2014/main" id="{251E8E36-5DC1-151F-5F84-AD537C50A6F4}"/>
+                <a16:creationId xmlns:a16="http://schemas.microsoft.com/office/drawing/2014/main" id="{47C72902-D56F-4E3D-4AB0-29B4CEEDC7E6}"/>
               </a:ext>
             </a:extLst>
           </p:cNvPr>
@@ -1927,7 +1927,7 @@
           <p:cNvPr id="6" name="コンテンツ プレースホルダー 5">
             <a:extLst>
               <a:ext uri="{FF2B5EF4-FFF2-40B4-BE49-F238E27FC236}">
-                <a16:creationId xmlns:a16="http://schemas.microsoft.com/office/drawing/2014/main" id="{04D20FD4-F328-70DA-E02B-8785ED5CC99E}"/>
+                <a16:creationId xmlns:a16="http://schemas.microsoft.com/office/drawing/2014/main" id="{4B7F560C-3295-B75C-193D-DCB84E28BBFB}"/>
               </a:ext>
             </a:extLst>
           </p:cNvPr>
@@ -2021,7 +2021,7 @@
           <p:cNvPr id="7" name="日付プレースホルダー 6">
             <a:extLst>
               <a:ext uri="{FF2B5EF4-FFF2-40B4-BE49-F238E27FC236}">
-                <a16:creationId xmlns:a16="http://schemas.microsoft.com/office/drawing/2014/main" id="{E479EBF9-F00D-82F4-35F1-1A878A96B6CD}"/>
+                <a16:creationId xmlns:a16="http://schemas.microsoft.com/office/drawing/2014/main" id="{2FBCE698-C8D8-07B6-F67F-81E7455E667A}"/>
               </a:ext>
             </a:extLst>
           </p:cNvPr>
@@ -2037,7 +2037,7 @@
           <a:bodyPr/>
           <a:lstStyle/>
           <a:p>
-            <a:fld id="{D5D704FA-7BE9-43FB-A986-D3D708755B41}" type="datetimeFigureOut">
+            <a:fld id="{5F292C0C-33D6-4CA9-8A07-732F13342A7B}" type="datetimeFigureOut">
               <a:rPr kumimoji="1" lang="ja-JP" altLang="en-US" smtClean="0"/>
               <a:t>2026/7/30</a:t>
             </a:fld>
@@ -2050,7 +2050,7 @@
           <p:cNvPr id="8" name="フッター プレースホルダー 7">
             <a:extLst>
               <a:ext uri="{FF2B5EF4-FFF2-40B4-BE49-F238E27FC236}">
-                <a16:creationId xmlns:a16="http://schemas.microsoft.com/office/drawing/2014/main" id="{1303CB00-5E4F-E45E-DDF8-C65806078023}"/>
+                <a16:creationId xmlns:a16="http://schemas.microsoft.com/office/drawing/2014/main" id="{349A7939-2512-8170-CAF5-179887BF3A64}"/>
               </a:ext>
             </a:extLst>
           </p:cNvPr>
@@ -2075,7 +2075,7 @@
           <p:cNvPr id="9" name="スライド番号プレースホルダー 8">
             <a:extLst>
               <a:ext uri="{FF2B5EF4-FFF2-40B4-BE49-F238E27FC236}">
-                <a16:creationId xmlns:a16="http://schemas.microsoft.com/office/drawing/2014/main" id="{FB7FB0F4-54F2-2685-5467-78E304BC3847}"/>
+                <a16:creationId xmlns:a16="http://schemas.microsoft.com/office/drawing/2014/main" id="{76FFC940-87B3-69A7-2DC9-607A331EBB60}"/>
               </a:ext>
             </a:extLst>
           </p:cNvPr>
@@ -2091,7 +2091,7 @@
           <a:bodyPr/>
           <a:lstStyle/>
           <a:p>
-            <a:fld id="{C16136AF-B964-45A3-AE70-25FF80B9EE4A}" type="slidenum">
+            <a:fld id="{F79AFA1A-DBCF-4772-8807-12CC9A701676}" type="slidenum">
               <a:rPr kumimoji="1" lang="ja-JP" altLang="en-US" smtClean="0"/>
               <a:t>‹#›</a:t>
             </a:fld>
@@ -2102,7 +2102,7 @@
     </p:spTree>
     <p:extLst>
       <p:ext uri="{BB962C8B-B14F-4D97-AF65-F5344CB8AC3E}">
-        <p14:creationId xmlns:p14="http://schemas.microsoft.com/office/powerpoint/2010/main" val="5711925"/>
+        <p14:creationId xmlns:p14="http://schemas.microsoft.com/office/powerpoint/2010/main" val="189880677"/>
       </p:ext>
     </p:extLst>
   </p:cSld>
@@ -2134,7 +2134,7 @@
           <p:cNvPr id="2" name="タイトル 1">
             <a:extLst>
               <a:ext uri="{FF2B5EF4-FFF2-40B4-BE49-F238E27FC236}">
-                <a16:creationId xmlns:a16="http://schemas.microsoft.com/office/drawing/2014/main" id="{09204585-C13E-80A0-57A4-33B5ED6250BF}"/>
+                <a16:creationId xmlns:a16="http://schemas.microsoft.com/office/drawing/2014/main" id="{D039587F-E7DB-C0EE-0BF6-2648BB9324AB}"/>
               </a:ext>
             </a:extLst>
           </p:cNvPr>
@@ -2162,7 +2162,7 @@
           <p:cNvPr id="3" name="日付プレースホルダー 2">
             <a:extLst>
               <a:ext uri="{FF2B5EF4-FFF2-40B4-BE49-F238E27FC236}">
-                <a16:creationId xmlns:a16="http://schemas.microsoft.com/office/drawing/2014/main" id="{FCB164C2-6FB0-9D28-7256-B5ED4361D1C9}"/>
+                <a16:creationId xmlns:a16="http://schemas.microsoft.com/office/drawing/2014/main" id="{EEB17E98-EF53-654B-1D5D-3D61CCB9BE10}"/>
               </a:ext>
             </a:extLst>
           </p:cNvPr>
@@ -2178,7 +2178,7 @@
           <a:bodyPr/>
           <a:lstStyle/>
           <a:p>
-            <a:fld id="{D5D704FA-7BE9-43FB-A986-D3D708755B41}" type="datetimeFigureOut">
+            <a:fld id="{5F292C0C-33D6-4CA9-8A07-732F13342A7B}" type="datetimeFigureOut">
               <a:rPr kumimoji="1" lang="ja-JP" altLang="en-US" smtClean="0"/>
               <a:t>2026/7/30</a:t>
             </a:fld>
@@ -2191,7 +2191,7 @@
           <p:cNvPr id="4" name="フッター プレースホルダー 3">
             <a:extLst>
               <a:ext uri="{FF2B5EF4-FFF2-40B4-BE49-F238E27FC236}">
-                <a16:creationId xmlns:a16="http://schemas.microsoft.com/office/drawing/2014/main" id="{1952A6CD-ACFF-4C37-AF16-80F63D5C553F}"/>
+                <a16:creationId xmlns:a16="http://schemas.microsoft.com/office/drawing/2014/main" id="{9C94AB49-0D71-03D0-6F83-9E5CC13213E1}"/>
               </a:ext>
             </a:extLst>
           </p:cNvPr>
@@ -2216,7 +2216,7 @@
           <p:cNvPr id="5" name="スライド番号プレースホルダー 4">
             <a:extLst>
               <a:ext uri="{FF2B5EF4-FFF2-40B4-BE49-F238E27FC236}">
-                <a16:creationId xmlns:a16="http://schemas.microsoft.com/office/drawing/2014/main" id="{BC7597BE-B20B-2FAA-4ED9-E34FE43821D1}"/>
+                <a16:creationId xmlns:a16="http://schemas.microsoft.com/office/drawing/2014/main" id="{3772A00F-62EE-4585-B8FE-719C5D32827C}"/>
               </a:ext>
             </a:extLst>
           </p:cNvPr>
@@ -2232,7 +2232,7 @@
           <a:bodyPr/>
           <a:lstStyle/>
           <a:p>
-            <a:fld id="{C16136AF-B964-45A3-AE70-25FF80B9EE4A}" type="slidenum">
+            <a:fld id="{F79AFA1A-DBCF-4772-8807-12CC9A701676}" type="slidenum">
               <a:rPr kumimoji="1" lang="ja-JP" altLang="en-US" smtClean="0"/>
               <a:t>‹#›</a:t>
             </a:fld>
@@ -2243,7 +2243,7 @@
     </p:spTree>
     <p:extLst>
       <p:ext uri="{BB962C8B-B14F-4D97-AF65-F5344CB8AC3E}">
-        <p14:creationId xmlns:p14="http://schemas.microsoft.com/office/powerpoint/2010/main" val="1203749204"/>
+        <p14:creationId xmlns:p14="http://schemas.microsoft.com/office/powerpoint/2010/main" val="3648611579"/>
       </p:ext>
     </p:extLst>
   </p:cSld>
@@ -2275,7 +2275,7 @@
           <p:cNvPr id="2" name="日付プレースホルダー 1">
             <a:extLst>
               <a:ext uri="{FF2B5EF4-FFF2-40B4-BE49-F238E27FC236}">
-                <a16:creationId xmlns:a16="http://schemas.microsoft.com/office/drawing/2014/main" id="{49E92BDA-3857-1C79-1461-5554C808C7BB}"/>
+                <a16:creationId xmlns:a16="http://schemas.microsoft.com/office/drawing/2014/main" id="{662FED1F-897B-04DB-D7A9-D3C689900628}"/>
               </a:ext>
             </a:extLst>
           </p:cNvPr>
@@ -2291,7 +2291,7 @@
           <a:bodyPr/>
           <a:lstStyle/>
           <a:p>
-            <a:fld id="{D5D704FA-7BE9-43FB-A986-D3D708755B41}" type="datetimeFigureOut">
+            <a:fld id="{5F292C0C-33D6-4CA9-8A07-732F13342A7B}" type="datetimeFigureOut">
               <a:rPr kumimoji="1" lang="ja-JP" altLang="en-US" smtClean="0"/>
               <a:t>2026/7/30</a:t>
             </a:fld>
@@ -2304,7 +2304,7 @@
           <p:cNvPr id="3" name="フッター プレースホルダー 2">
             <a:extLst>
               <a:ext uri="{FF2B5EF4-FFF2-40B4-BE49-F238E27FC236}">
-                <a16:creationId xmlns:a16="http://schemas.microsoft.com/office/drawing/2014/main" id="{B947AA71-1A1A-F4FE-0974-AF85DD6F502A}"/>
+                <a16:creationId xmlns:a16="http://schemas.microsoft.com/office/drawing/2014/main" id="{034F0034-D955-E276-E313-F9A177664553}"/>
               </a:ext>
             </a:extLst>
           </p:cNvPr>
@@ -2329,7 +2329,7 @@
           <p:cNvPr id="4" name="スライド番号プレースホルダー 3">
             <a:extLst>
               <a:ext uri="{FF2B5EF4-FFF2-40B4-BE49-F238E27FC236}">
-                <a16:creationId xmlns:a16="http://schemas.microsoft.com/office/drawing/2014/main" id="{6FC4AA6A-8E8D-040B-4908-986B61297A9A}"/>
+                <a16:creationId xmlns:a16="http://schemas.microsoft.com/office/drawing/2014/main" id="{4B6DD86A-53FF-EF70-1A45-3B57823F1B1B}"/>
               </a:ext>
             </a:extLst>
           </p:cNvPr>
@@ -2345,7 +2345,7 @@
           <a:bodyPr/>
           <a:lstStyle/>
           <a:p>
-            <a:fld id="{C16136AF-B964-45A3-AE70-25FF80B9EE4A}" type="slidenum">
+            <a:fld id="{F79AFA1A-DBCF-4772-8807-12CC9A701676}" type="slidenum">
               <a:rPr kumimoji="1" lang="ja-JP" altLang="en-US" smtClean="0"/>
               <a:t>‹#›</a:t>
             </a:fld>
@@ -2356,7 +2356,7 @@
     </p:spTree>
     <p:extLst>
       <p:ext uri="{BB962C8B-B14F-4D97-AF65-F5344CB8AC3E}">
-        <p14:creationId xmlns:p14="http://schemas.microsoft.com/office/powerpoint/2010/main" val="2641313975"/>
+        <p14:creationId xmlns:p14="http://schemas.microsoft.com/office/powerpoint/2010/main" val="258890857"/>
       </p:ext>
     </p:extLst>
   </p:cSld>
@@ -2388,7 +2388,7 @@
           <p:cNvPr id="2" name="タイトル 1">
             <a:extLst>
               <a:ext uri="{FF2B5EF4-FFF2-40B4-BE49-F238E27FC236}">
-                <a16:creationId xmlns:a16="http://schemas.microsoft.com/office/drawing/2014/main" id="{8CB60ACA-4DCD-AC51-4F37-D0CE216C3A5E}"/>
+                <a16:creationId xmlns:a16="http://schemas.microsoft.com/office/drawing/2014/main" id="{0DCDC9EB-1A5C-4144-A9EC-CC0878D3E16A}"/>
               </a:ext>
             </a:extLst>
           </p:cNvPr>
@@ -2425,7 +2425,7 @@
           <p:cNvPr id="3" name="コンテンツ プレースホルダー 2">
             <a:extLst>
               <a:ext uri="{FF2B5EF4-FFF2-40B4-BE49-F238E27FC236}">
-                <a16:creationId xmlns:a16="http://schemas.microsoft.com/office/drawing/2014/main" id="{1660F97B-53B7-E044-F3C1-8609804EEC9B}"/>
+                <a16:creationId xmlns:a16="http://schemas.microsoft.com/office/drawing/2014/main" id="{E960FA96-A34B-9BF7-BEDD-B217DDECEFB4}"/>
               </a:ext>
             </a:extLst>
           </p:cNvPr>
@@ -2547,7 +2547,7 @@
           <p:cNvPr id="4" name="テキスト プレースホルダー 3">
             <a:extLst>
               <a:ext uri="{FF2B5EF4-FFF2-40B4-BE49-F238E27FC236}">
-                <a16:creationId xmlns:a16="http://schemas.microsoft.com/office/drawing/2014/main" id="{3324078B-784B-2BB8-B8D4-4901260C4D5D}"/>
+                <a16:creationId xmlns:a16="http://schemas.microsoft.com/office/drawing/2014/main" id="{DDD5C368-C319-637C-067F-9F4E60419A62}"/>
               </a:ext>
             </a:extLst>
           </p:cNvPr>
@@ -2618,7 +2618,7 @@
           <p:cNvPr id="5" name="日付プレースホルダー 4">
             <a:extLst>
               <a:ext uri="{FF2B5EF4-FFF2-40B4-BE49-F238E27FC236}">
-                <a16:creationId xmlns:a16="http://schemas.microsoft.com/office/drawing/2014/main" id="{46714DE3-1F4B-D2C9-BB81-FF06B385E527}"/>
+                <a16:creationId xmlns:a16="http://schemas.microsoft.com/office/drawing/2014/main" id="{DC9B59EF-E789-250D-1045-4788B618D1FF}"/>
               </a:ext>
             </a:extLst>
           </p:cNvPr>
@@ -2634,7 +2634,7 @@
           <a:bodyPr/>
           <a:lstStyle/>
           <a:p>
-            <a:fld id="{D5D704FA-7BE9-43FB-A986-D3D708755B41}" type="datetimeFigureOut">
+            <a:fld id="{5F292C0C-33D6-4CA9-8A07-732F13342A7B}" type="datetimeFigureOut">
               <a:rPr kumimoji="1" lang="ja-JP" altLang="en-US" smtClean="0"/>
               <a:t>2026/7/30</a:t>
             </a:fld>
@@ -2647,7 +2647,7 @@
           <p:cNvPr id="6" name="フッター プレースホルダー 5">
             <a:extLst>
               <a:ext uri="{FF2B5EF4-FFF2-40B4-BE49-F238E27FC236}">
-                <a16:creationId xmlns:a16="http://schemas.microsoft.com/office/drawing/2014/main" id="{653A54D8-7C46-1CDB-0B70-C9A75CD45032}"/>
+                <a16:creationId xmlns:a16="http://schemas.microsoft.com/office/drawing/2014/main" id="{71153FAC-9020-CB9C-52C4-75D8134F614A}"/>
               </a:ext>
             </a:extLst>
           </p:cNvPr>
@@ -2672,7 +2672,7 @@
           <p:cNvPr id="7" name="スライド番号プレースホルダー 6">
             <a:extLst>
               <a:ext uri="{FF2B5EF4-FFF2-40B4-BE49-F238E27FC236}">
-                <a16:creationId xmlns:a16="http://schemas.microsoft.com/office/drawing/2014/main" id="{C00D58AE-F411-9A74-BFDA-3988FBBE90CC}"/>
+                <a16:creationId xmlns:a16="http://schemas.microsoft.com/office/drawing/2014/main" id="{C93E332B-8F21-ADA6-BB37-90EE6C93D7E3}"/>
               </a:ext>
             </a:extLst>
           </p:cNvPr>
@@ -2688,7 +2688,7 @@
           <a:bodyPr/>
           <a:lstStyle/>
           <a:p>
-            <a:fld id="{C16136AF-B964-45A3-AE70-25FF80B9EE4A}" type="slidenum">
+            <a:fld id="{F79AFA1A-DBCF-4772-8807-12CC9A701676}" type="slidenum">
               <a:rPr kumimoji="1" lang="ja-JP" altLang="en-US" smtClean="0"/>
               <a:t>‹#›</a:t>
             </a:fld>
@@ -2699,7 +2699,7 @@
     </p:spTree>
     <p:extLst>
       <p:ext uri="{BB962C8B-B14F-4D97-AF65-F5344CB8AC3E}">
-        <p14:creationId xmlns:p14="http://schemas.microsoft.com/office/powerpoint/2010/main" val="3206547648"/>
+        <p14:creationId xmlns:p14="http://schemas.microsoft.com/office/powerpoint/2010/main" val="2608312752"/>
       </p:ext>
     </p:extLst>
   </p:cSld>
@@ -2731,7 +2731,7 @@
           <p:cNvPr id="2" name="タイトル 1">
             <a:extLst>
               <a:ext uri="{FF2B5EF4-FFF2-40B4-BE49-F238E27FC236}">
-                <a16:creationId xmlns:a16="http://schemas.microsoft.com/office/drawing/2014/main" id="{680B6B61-DCBE-5ED4-89A1-73F6985BFF19}"/>
+                <a16:creationId xmlns:a16="http://schemas.microsoft.com/office/drawing/2014/main" id="{8BD66C2E-5A42-C886-DAF3-1683090C49F4}"/>
               </a:ext>
             </a:extLst>
           </p:cNvPr>
@@ -2768,7 +2768,7 @@
           <p:cNvPr id="3" name="図プレースホルダー 2">
             <a:extLst>
               <a:ext uri="{FF2B5EF4-FFF2-40B4-BE49-F238E27FC236}">
-                <a16:creationId xmlns:a16="http://schemas.microsoft.com/office/drawing/2014/main" id="{A68B6A86-20AE-616E-B25E-4C29500D2E4A}"/>
+                <a16:creationId xmlns:a16="http://schemas.microsoft.com/office/drawing/2014/main" id="{A6CE19AE-1D02-8EF4-F2CD-2FA0FA1044D2}"/>
               </a:ext>
             </a:extLst>
           </p:cNvPr>
@@ -2835,7 +2835,7 @@
           <p:cNvPr id="4" name="テキスト プレースホルダー 3">
             <a:extLst>
               <a:ext uri="{FF2B5EF4-FFF2-40B4-BE49-F238E27FC236}">
-                <a16:creationId xmlns:a16="http://schemas.microsoft.com/office/drawing/2014/main" id="{ED5B40C0-9CC7-06F5-7545-82265C11777E}"/>
+                <a16:creationId xmlns:a16="http://schemas.microsoft.com/office/drawing/2014/main" id="{7A28EA2A-2452-6DDD-9E4C-A97885A0F246}"/>
               </a:ext>
             </a:extLst>
           </p:cNvPr>
@@ -2906,7 +2906,7 @@
           <p:cNvPr id="5" name="日付プレースホルダー 4">
             <a:extLst>
               <a:ext uri="{FF2B5EF4-FFF2-40B4-BE49-F238E27FC236}">
-                <a16:creationId xmlns:a16="http://schemas.microsoft.com/office/drawing/2014/main" id="{4E1F2FC7-6593-9EA5-504C-5A4662CB8101}"/>
+                <a16:creationId xmlns:a16="http://schemas.microsoft.com/office/drawing/2014/main" id="{152DC03F-EA40-D129-B919-BECCCF4A13F9}"/>
               </a:ext>
             </a:extLst>
           </p:cNvPr>
@@ -2922,7 +2922,7 @@
           <a:bodyPr/>
           <a:lstStyle/>
           <a:p>
-            <a:fld id="{D5D704FA-7BE9-43FB-A986-D3D708755B41}" type="datetimeFigureOut">
+            <a:fld id="{5F292C0C-33D6-4CA9-8A07-732F13342A7B}" type="datetimeFigureOut">
               <a:rPr kumimoji="1" lang="ja-JP" altLang="en-US" smtClean="0"/>
               <a:t>2026/7/30</a:t>
             </a:fld>
@@ -2935,7 +2935,7 @@
           <p:cNvPr id="6" name="フッター プレースホルダー 5">
             <a:extLst>
               <a:ext uri="{FF2B5EF4-FFF2-40B4-BE49-F238E27FC236}">
-                <a16:creationId xmlns:a16="http://schemas.microsoft.com/office/drawing/2014/main" id="{7B9CE061-E091-5DCB-46B3-5649D0B53378}"/>
+                <a16:creationId xmlns:a16="http://schemas.microsoft.com/office/drawing/2014/main" id="{45084EBD-15F8-EC66-01DD-E1851B54FE91}"/>
               </a:ext>
             </a:extLst>
           </p:cNvPr>
@@ -2960,7 +2960,7 @@
           <p:cNvPr id="7" name="スライド番号プレースホルダー 6">
             <a:extLst>
               <a:ext uri="{FF2B5EF4-FFF2-40B4-BE49-F238E27FC236}">
-                <a16:creationId xmlns:a16="http://schemas.microsoft.com/office/drawing/2014/main" id="{4BD59F4F-7B0F-6C21-61DA-08F16C46818B}"/>
+                <a16:creationId xmlns:a16="http://schemas.microsoft.com/office/drawing/2014/main" id="{E10665DB-D38D-DE0A-D3B8-7549C8FD4931}"/>
               </a:ext>
             </a:extLst>
           </p:cNvPr>
@@ -2976,7 +2976,7 @@
           <a:bodyPr/>
           <a:lstStyle/>
           <a:p>
-            <a:fld id="{C16136AF-B964-45A3-AE70-25FF80B9EE4A}" type="slidenum">
+            <a:fld id="{F79AFA1A-DBCF-4772-8807-12CC9A701676}" type="slidenum">
               <a:rPr kumimoji="1" lang="ja-JP" altLang="en-US" smtClean="0"/>
               <a:t>‹#›</a:t>
             </a:fld>
@@ -2987,7 +2987,7 @@
     </p:spTree>
     <p:extLst>
       <p:ext uri="{BB962C8B-B14F-4D97-AF65-F5344CB8AC3E}">
-        <p14:creationId xmlns:p14="http://schemas.microsoft.com/office/powerpoint/2010/main" val="3055418413"/>
+        <p14:creationId xmlns:p14="http://schemas.microsoft.com/office/powerpoint/2010/main" val="1508274734"/>
       </p:ext>
     </p:extLst>
   </p:cSld>
@@ -3024,7 +3024,7 @@
           <p:cNvPr id="2" name="タイトル プレースホルダー 1">
             <a:extLst>
               <a:ext uri="{FF2B5EF4-FFF2-40B4-BE49-F238E27FC236}">
-                <a16:creationId xmlns:a16="http://schemas.microsoft.com/office/drawing/2014/main" id="{79107EE3-F772-2AB6-1A72-BC6ED3244345}"/>
+                <a16:creationId xmlns:a16="http://schemas.microsoft.com/office/drawing/2014/main" id="{DB747023-1CC5-9DDE-53FB-667C609D5BF0}"/>
               </a:ext>
             </a:extLst>
           </p:cNvPr>
@@ -3062,7 +3062,7 @@
           <p:cNvPr id="3" name="テキスト プレースホルダー 2">
             <a:extLst>
               <a:ext uri="{FF2B5EF4-FFF2-40B4-BE49-F238E27FC236}">
-                <a16:creationId xmlns:a16="http://schemas.microsoft.com/office/drawing/2014/main" id="{B556D12E-7268-8028-EF44-CB7FD46F9641}"/>
+                <a16:creationId xmlns:a16="http://schemas.microsoft.com/office/drawing/2014/main" id="{217F2401-31B2-4EC7-1735-1C06C2574AC0}"/>
               </a:ext>
             </a:extLst>
           </p:cNvPr>
@@ -3161,7 +3161,7 @@
           <p:cNvPr id="4" name="日付プレースホルダー 3">
             <a:extLst>
               <a:ext uri="{FF2B5EF4-FFF2-40B4-BE49-F238E27FC236}">
-                <a16:creationId xmlns:a16="http://schemas.microsoft.com/office/drawing/2014/main" id="{AE07AC47-C63E-1E21-47AF-BD3CB17F279D}"/>
+                <a16:creationId xmlns:a16="http://schemas.microsoft.com/office/drawing/2014/main" id="{CD5F91EB-3D83-6DD6-63E4-EF7F7F90786E}"/>
               </a:ext>
             </a:extLst>
           </p:cNvPr>
@@ -3195,7 +3195,7 @@
             </a:lvl1pPr>
           </a:lstStyle>
           <a:p>
-            <a:fld id="{D5D704FA-7BE9-43FB-A986-D3D708755B41}" type="datetimeFigureOut">
+            <a:fld id="{5F292C0C-33D6-4CA9-8A07-732F13342A7B}" type="datetimeFigureOut">
               <a:rPr kumimoji="1" lang="ja-JP" altLang="en-US" smtClean="0"/>
               <a:t>2026/7/30</a:t>
             </a:fld>
@@ -3208,7 +3208,7 @@
           <p:cNvPr id="5" name="フッター プレースホルダー 4">
             <a:extLst>
               <a:ext uri="{FF2B5EF4-FFF2-40B4-BE49-F238E27FC236}">
-                <a16:creationId xmlns:a16="http://schemas.microsoft.com/office/drawing/2014/main" id="{645DEE8F-A39A-A57B-F634-ACC26879F24D}"/>
+                <a16:creationId xmlns:a16="http://schemas.microsoft.com/office/drawing/2014/main" id="{690544D5-5A3F-5D21-F560-1AB31A3EC46B}"/>
               </a:ext>
             </a:extLst>
           </p:cNvPr>
@@ -3251,7 +3251,7 @@
           <p:cNvPr id="6" name="スライド番号プレースホルダー 5">
             <a:extLst>
               <a:ext uri="{FF2B5EF4-FFF2-40B4-BE49-F238E27FC236}">
-                <a16:creationId xmlns:a16="http://schemas.microsoft.com/office/drawing/2014/main" id="{C7CCEE92-ECAC-5864-A0CD-C53800B7DFCB}"/>
+                <a16:creationId xmlns:a16="http://schemas.microsoft.com/office/drawing/2014/main" id="{3E178087-1519-3BBC-6D81-82F0737CC8F7}"/>
               </a:ext>
             </a:extLst>
           </p:cNvPr>
@@ -3285,7 +3285,7 @@
             </a:lvl1pPr>
           </a:lstStyle>
           <a:p>
-            <a:fld id="{C16136AF-B964-45A3-AE70-25FF80B9EE4A}" type="slidenum">
+            <a:fld id="{F79AFA1A-DBCF-4772-8807-12CC9A701676}" type="slidenum">
               <a:rPr kumimoji="1" lang="ja-JP" altLang="en-US" smtClean="0"/>
               <a:t>‹#›</a:t>
             </a:fld>
@@ -3296,7 +3296,7 @@
     </p:spTree>
     <p:extLst>
       <p:ext uri="{BB962C8B-B14F-4D97-AF65-F5344CB8AC3E}">
-        <p14:creationId xmlns:p14="http://schemas.microsoft.com/office/powerpoint/2010/main" val="565946243"/>
+        <p14:creationId xmlns:p14="http://schemas.microsoft.com/office/powerpoint/2010/main" val="468768375"/>
       </p:ext>
     </p:extLst>
   </p:cSld>
@@ -3619,7 +3619,7 @@
           <p:cNvPr id="2" name="テキスト ボックス 1">
             <a:extLst>
               <a:ext uri="{FF2B5EF4-FFF2-40B4-BE49-F238E27FC236}">
-                <a16:creationId xmlns:a16="http://schemas.microsoft.com/office/drawing/2014/main" id="{5402FCD7-EE37-7280-0C0A-C51C138E704C}"/>
+                <a16:creationId xmlns:a16="http://schemas.microsoft.com/office/drawing/2014/main" id="{22459E69-2281-D0ED-1444-721547441E1D}"/>
               </a:ext>
             </a:extLst>
           </p:cNvPr>
@@ -3665,7 +3665,7 @@
           <p:cNvPr id="3" name="テキスト ボックス 2">
             <a:extLst>
               <a:ext uri="{FF2B5EF4-FFF2-40B4-BE49-F238E27FC236}">
-                <a16:creationId xmlns:a16="http://schemas.microsoft.com/office/drawing/2014/main" id="{7E1341A4-F197-C41D-32E0-42770D9C20D2}"/>
+                <a16:creationId xmlns:a16="http://schemas.microsoft.com/office/drawing/2014/main" id="{22E20968-8876-16A9-FB23-B90F8CED1819}"/>
               </a:ext>
             </a:extLst>
           </p:cNvPr>
@@ -3714,7 +3714,7 @@
           <p:cNvPr id="4" name="テキスト ボックス 3">
             <a:extLst>
               <a:ext uri="{FF2B5EF4-FFF2-40B4-BE49-F238E27FC236}">
-                <a16:creationId xmlns:a16="http://schemas.microsoft.com/office/drawing/2014/main" id="{0C1491B1-333C-EBB2-51D0-C761E2BFAF2A}"/>
+                <a16:creationId xmlns:a16="http://schemas.microsoft.com/office/drawing/2014/main" id="{832B8300-1879-8DAD-0724-F26607AB1999}"/>
               </a:ext>
             </a:extLst>
           </p:cNvPr>
@@ -3754,7 +3754,7 @@
           <p:cNvPr id="5" name="テキスト ボックス 4">
             <a:extLst>
               <a:ext uri="{FF2B5EF4-FFF2-40B4-BE49-F238E27FC236}">
-                <a16:creationId xmlns:a16="http://schemas.microsoft.com/office/drawing/2014/main" id="{D081AA1E-7491-6C20-7AC7-1AAD1115C7BA}"/>
+                <a16:creationId xmlns:a16="http://schemas.microsoft.com/office/drawing/2014/main" id="{CD40395A-EDAF-2834-019B-3AAAFF285E41}"/>
               </a:ext>
             </a:extLst>
           </p:cNvPr>
@@ -3801,7 +3801,7 @@
             <a:hlinkClick r:id="" action="ppaction://media"/>
             <a:extLst>
               <a:ext uri="{FF2B5EF4-FFF2-40B4-BE49-F238E27FC236}">
-                <a16:creationId xmlns:a16="http://schemas.microsoft.com/office/drawing/2014/main" id="{58575291-1CC2-5A63-0D69-43D85466EE90}"/>
+                <a16:creationId xmlns:a16="http://schemas.microsoft.com/office/drawing/2014/main" id="{6A7FFF10-08B6-5B31-EF3E-029FCD7FE1BB}"/>
               </a:ext>
             </a:extLst>
           </p:cNvPr>
@@ -3836,7 +3836,7 @@
     </p:spTree>
     <p:extLst>
       <p:ext uri="{BB962C8B-B14F-4D97-AF65-F5344CB8AC3E}">
-        <p14:creationId xmlns:p14="http://schemas.microsoft.com/office/powerpoint/2010/main" val="3694898179"/>
+        <p14:creationId xmlns:p14="http://schemas.microsoft.com/office/powerpoint/2010/main" val="3701513347"/>
       </p:ext>
     </p:extLst>
   </p:cSld>
@@ -3960,7 +3960,7 @@
           <p:cNvPr id="2" name="テキスト ボックス 1">
             <a:extLst>
               <a:ext uri="{FF2B5EF4-FFF2-40B4-BE49-F238E27FC236}">
-                <a16:creationId xmlns:a16="http://schemas.microsoft.com/office/drawing/2014/main" id="{53BD9542-7FF4-FE47-C067-4B707F248EEA}"/>
+                <a16:creationId xmlns:a16="http://schemas.microsoft.com/office/drawing/2014/main" id="{4C0F588E-8491-DAA5-97D4-B557F4D46E49}"/>
               </a:ext>
             </a:extLst>
           </p:cNvPr>
@@ -4006,7 +4006,7 @@
           <p:cNvPr id="3" name="テキスト ボックス 2">
             <a:extLst>
               <a:ext uri="{FF2B5EF4-FFF2-40B4-BE49-F238E27FC236}">
-                <a16:creationId xmlns:a16="http://schemas.microsoft.com/office/drawing/2014/main" id="{F8CE08B4-6444-C1BF-E471-49631C0FBB01}"/>
+                <a16:creationId xmlns:a16="http://schemas.microsoft.com/office/drawing/2014/main" id="{46EA0FAB-9413-979F-6931-D34F505C87A0}"/>
               </a:ext>
             </a:extLst>
           </p:cNvPr>
@@ -4046,7 +4046,7 @@
           <p:cNvPr id="4" name="テキスト ボックス 3">
             <a:extLst>
               <a:ext uri="{FF2B5EF4-FFF2-40B4-BE49-F238E27FC236}">
-                <a16:creationId xmlns:a16="http://schemas.microsoft.com/office/drawing/2014/main" id="{DA83ADC4-2E13-E6FE-7310-845409951EE5}"/>
+                <a16:creationId xmlns:a16="http://schemas.microsoft.com/office/drawing/2014/main" id="{8086B662-9B97-A3F9-2C86-6D2BD0DB7827}"/>
               </a:ext>
             </a:extLst>
           </p:cNvPr>
@@ -4095,7 +4095,7 @@
           <p:cNvPr id="5" name="テキスト ボックス 4">
             <a:extLst>
               <a:ext uri="{FF2B5EF4-FFF2-40B4-BE49-F238E27FC236}">
-                <a16:creationId xmlns:a16="http://schemas.microsoft.com/office/drawing/2014/main" id="{2C820204-53D9-7202-6C26-4E75015DEE21}"/>
+                <a16:creationId xmlns:a16="http://schemas.microsoft.com/office/drawing/2014/main" id="{67D38635-18C7-246F-CABC-112B168A6A2D}"/>
               </a:ext>
             </a:extLst>
           </p:cNvPr>
@@ -4142,7 +4142,7 @@
             <a:hlinkClick r:id="" action="ppaction://media"/>
             <a:extLst>
               <a:ext uri="{FF2B5EF4-FFF2-40B4-BE49-F238E27FC236}">
-                <a16:creationId xmlns:a16="http://schemas.microsoft.com/office/drawing/2014/main" id="{781AE889-C7B0-0EE6-337E-6C8CFBEEABDE}"/>
+                <a16:creationId xmlns:a16="http://schemas.microsoft.com/office/drawing/2014/main" id="{F9C69ACF-0CCD-E881-9EA1-A022EABDAA6B}"/>
               </a:ext>
             </a:extLst>
           </p:cNvPr>
@@ -4177,7 +4177,7 @@
     </p:spTree>
     <p:extLst>
       <p:ext uri="{BB962C8B-B14F-4D97-AF65-F5344CB8AC3E}">
-        <p14:creationId xmlns:p14="http://schemas.microsoft.com/office/powerpoint/2010/main" val="3804090472"/>
+        <p14:creationId xmlns:p14="http://schemas.microsoft.com/office/powerpoint/2010/main" val="1587491940"/>
       </p:ext>
     </p:extLst>
   </p:cSld>
@@ -4301,7 +4301,7 @@
           <p:cNvPr id="2" name="テキスト ボックス 1">
             <a:extLst>
               <a:ext uri="{FF2B5EF4-FFF2-40B4-BE49-F238E27FC236}">
-                <a16:creationId xmlns:a16="http://schemas.microsoft.com/office/drawing/2014/main" id="{FA4248AE-32AD-78CE-7427-FE333E27FF93}"/>
+                <a16:creationId xmlns:a16="http://schemas.microsoft.com/office/drawing/2014/main" id="{D46DCEB5-0893-091A-4D54-C709A5562360}"/>
               </a:ext>
             </a:extLst>
           </p:cNvPr>
@@ -4347,7 +4347,7 @@
           <p:cNvPr id="3" name="テキスト ボックス 2">
             <a:extLst>
               <a:ext uri="{FF2B5EF4-FFF2-40B4-BE49-F238E27FC236}">
-                <a16:creationId xmlns:a16="http://schemas.microsoft.com/office/drawing/2014/main" id="{2B832A09-0BCC-878C-9778-1D049A547354}"/>
+                <a16:creationId xmlns:a16="http://schemas.microsoft.com/office/drawing/2014/main" id="{60076565-ACE3-4D17-0799-FCF26CC4C263}"/>
               </a:ext>
             </a:extLst>
           </p:cNvPr>
@@ -4387,7 +4387,7 @@
           <p:cNvPr id="4" name="テキスト ボックス 3">
             <a:extLst>
               <a:ext uri="{FF2B5EF4-FFF2-40B4-BE49-F238E27FC236}">
-                <a16:creationId xmlns:a16="http://schemas.microsoft.com/office/drawing/2014/main" id="{E47290BF-113A-6806-08EE-28A1E5F7ED85}"/>
+                <a16:creationId xmlns:a16="http://schemas.microsoft.com/office/drawing/2014/main" id="{45903ECC-88FA-464E-80D0-12C092DD6217}"/>
               </a:ext>
             </a:extLst>
           </p:cNvPr>
@@ -4428,7 +4428,7 @@
           <p:cNvPr id="5" name="テキスト ボックス 4">
             <a:extLst>
               <a:ext uri="{FF2B5EF4-FFF2-40B4-BE49-F238E27FC236}">
-                <a16:creationId xmlns:a16="http://schemas.microsoft.com/office/drawing/2014/main" id="{C39D33B8-68F5-DBB6-5813-4FC497C26843}"/>
+                <a16:creationId xmlns:a16="http://schemas.microsoft.com/office/drawing/2014/main" id="{FC43ED58-363B-F82A-D8AC-F2FBEDF1E99D}"/>
               </a:ext>
             </a:extLst>
           </p:cNvPr>
@@ -4475,7 +4475,7 @@
             <a:hlinkClick r:id="" action="ppaction://media"/>
             <a:extLst>
               <a:ext uri="{FF2B5EF4-FFF2-40B4-BE49-F238E27FC236}">
-                <a16:creationId xmlns:a16="http://schemas.microsoft.com/office/drawing/2014/main" id="{026A46EB-BD28-845C-8E14-22C327ABAD4D}"/>
+                <a16:creationId xmlns:a16="http://schemas.microsoft.com/office/drawing/2014/main" id="{197470F4-D5F2-181F-E8AF-A802B4E0C65E}"/>
               </a:ext>
             </a:extLst>
           </p:cNvPr>
@@ -4510,7 +4510,7 @@
     </p:spTree>
     <p:extLst>
       <p:ext uri="{BB962C8B-B14F-4D97-AF65-F5344CB8AC3E}">
-        <p14:creationId xmlns:p14="http://schemas.microsoft.com/office/powerpoint/2010/main" val="2611554518"/>
+        <p14:creationId xmlns:p14="http://schemas.microsoft.com/office/powerpoint/2010/main" val="1040155970"/>
       </p:ext>
     </p:extLst>
   </p:cSld>
@@ -4634,7 +4634,7 @@
           <p:cNvPr id="2" name="テキスト ボックス 1">
             <a:extLst>
               <a:ext uri="{FF2B5EF4-FFF2-40B4-BE49-F238E27FC236}">
-                <a16:creationId xmlns:a16="http://schemas.microsoft.com/office/drawing/2014/main" id="{BB0A1606-5F85-D9E8-CCDB-278B20401132}"/>
+                <a16:creationId xmlns:a16="http://schemas.microsoft.com/office/drawing/2014/main" id="{318792FB-E093-246C-3092-7FF464FDD49B}"/>
               </a:ext>
             </a:extLst>
           </p:cNvPr>
@@ -4680,7 +4680,7 @@
           <p:cNvPr id="3" name="テキスト ボックス 2">
             <a:extLst>
               <a:ext uri="{FF2B5EF4-FFF2-40B4-BE49-F238E27FC236}">
-                <a16:creationId xmlns:a16="http://schemas.microsoft.com/office/drawing/2014/main" id="{4FC75DF3-B67E-B0E3-3156-08BA7D18EF7F}"/>
+                <a16:creationId xmlns:a16="http://schemas.microsoft.com/office/drawing/2014/main" id="{E83C5FF1-4903-7F51-A060-622588C335FB}"/>
               </a:ext>
             </a:extLst>
           </p:cNvPr>
@@ -4720,7 +4720,7 @@
           <p:cNvPr id="4" name="テキスト ボックス 3">
             <a:extLst>
               <a:ext uri="{FF2B5EF4-FFF2-40B4-BE49-F238E27FC236}">
-                <a16:creationId xmlns:a16="http://schemas.microsoft.com/office/drawing/2014/main" id="{0D1BD7D7-ABBC-EA81-5893-01404674A4BB}"/>
+                <a16:creationId xmlns:a16="http://schemas.microsoft.com/office/drawing/2014/main" id="{2EF46791-4F72-F026-CDF5-8AC82C2047FB}"/>
               </a:ext>
             </a:extLst>
           </p:cNvPr>
@@ -4779,7 +4779,7 @@
           <p:cNvPr id="5" name="テキスト ボックス 4">
             <a:extLst>
               <a:ext uri="{FF2B5EF4-FFF2-40B4-BE49-F238E27FC236}">
-                <a16:creationId xmlns:a16="http://schemas.microsoft.com/office/drawing/2014/main" id="{DB1911DF-5568-4B04-8FE4-C4635FB30CCD}"/>
+                <a16:creationId xmlns:a16="http://schemas.microsoft.com/office/drawing/2014/main" id="{6FE96775-05A8-83A9-D5FA-9DE94EA78F2B}"/>
               </a:ext>
             </a:extLst>
           </p:cNvPr>
@@ -4826,7 +4826,7 @@
             <a:hlinkClick r:id="" action="ppaction://media"/>
             <a:extLst>
               <a:ext uri="{FF2B5EF4-FFF2-40B4-BE49-F238E27FC236}">
-                <a16:creationId xmlns:a16="http://schemas.microsoft.com/office/drawing/2014/main" id="{5E6638FF-1BC9-3D27-6565-093C20EB3B4E}"/>
+                <a16:creationId xmlns:a16="http://schemas.microsoft.com/office/drawing/2014/main" id="{26579AE2-5F25-453B-FD04-7D56CF94FD01}"/>
               </a:ext>
             </a:extLst>
           </p:cNvPr>
@@ -4861,7 +4861,7 @@
     </p:spTree>
     <p:extLst>
       <p:ext uri="{BB962C8B-B14F-4D97-AF65-F5344CB8AC3E}">
-        <p14:creationId xmlns:p14="http://schemas.microsoft.com/office/powerpoint/2010/main" val="3190012050"/>
+        <p14:creationId xmlns:p14="http://schemas.microsoft.com/office/powerpoint/2010/main" val="2969343286"/>
       </p:ext>
     </p:extLst>
   </p:cSld>
@@ -4985,7 +4985,7 @@
           <p:cNvPr id="2" name="テキスト ボックス 1">
             <a:extLst>
               <a:ext uri="{FF2B5EF4-FFF2-40B4-BE49-F238E27FC236}">
-                <a16:creationId xmlns:a16="http://schemas.microsoft.com/office/drawing/2014/main" id="{4D7D260B-E20D-0BBE-0F97-E80F5D4F778A}"/>
+                <a16:creationId xmlns:a16="http://schemas.microsoft.com/office/drawing/2014/main" id="{1D0DD70D-E0FF-3183-660E-7F991E4D1899}"/>
               </a:ext>
             </a:extLst>
           </p:cNvPr>
@@ -5031,7 +5031,7 @@
           <p:cNvPr id="3" name="テキスト ボックス 2">
             <a:extLst>
               <a:ext uri="{FF2B5EF4-FFF2-40B4-BE49-F238E27FC236}">
-                <a16:creationId xmlns:a16="http://schemas.microsoft.com/office/drawing/2014/main" id="{EA7FDEE4-1FC5-3A98-34E8-F7F61725D88E}"/>
+                <a16:creationId xmlns:a16="http://schemas.microsoft.com/office/drawing/2014/main" id="{6F5578BE-DB5F-B175-C893-6746D62CE574}"/>
               </a:ext>
             </a:extLst>
           </p:cNvPr>
@@ -5071,7 +5071,7 @@
           <p:cNvPr id="4" name="テキスト ボックス 3">
             <a:extLst>
               <a:ext uri="{FF2B5EF4-FFF2-40B4-BE49-F238E27FC236}">
-                <a16:creationId xmlns:a16="http://schemas.microsoft.com/office/drawing/2014/main" id="{36578BDD-11D5-FDB8-FF8F-550FC6F5E86B}"/>
+                <a16:creationId xmlns:a16="http://schemas.microsoft.com/office/drawing/2014/main" id="{540151BB-39B3-4FE0-7C2B-16CA5A7978D7}"/>
               </a:ext>
             </a:extLst>
           </p:cNvPr>
@@ -5095,20 +5095,14 @@
           <a:lstStyle/>
           <a:p>
             <a:r>
-              <a:rPr kumimoji="1" lang="en-US" altLang="ja-JP" sz="2000">
+              <a:rPr kumimoji="1" lang="ja-JP" altLang="en-US" sz="2000">
                 <a:solidFill>
                   <a:srgbClr val="333333"/>
                 </a:solidFill>
                 <a:latin typeface="Arial" panose="020B0604020202020204" pitchFamily="34" charset="0"/>
               </a:rPr>
-              <a:t>Initialize repository</a:t>
-            </a:r>
-            <a:endParaRPr kumimoji="1" lang="ja-JP" altLang="en-US" sz="2000">
-              <a:solidFill>
-                <a:srgbClr val="333333"/>
-              </a:solidFill>
-              <a:latin typeface="Arial" panose="020B0604020202020204" pitchFamily="34" charset="0"/>
-            </a:endParaRPr>
+              <a:t>直近のコミットでは、プロジェクトの初期構成と開発基盤が整備されました。</a:t>
+            </a:r>
           </a:p>
         </p:txBody>
       </p:sp>
@@ -5117,7 +5111,7 @@
           <p:cNvPr id="5" name="テキスト ボックス 4">
             <a:extLst>
               <a:ext uri="{FF2B5EF4-FFF2-40B4-BE49-F238E27FC236}">
-                <a16:creationId xmlns:a16="http://schemas.microsoft.com/office/drawing/2014/main" id="{786E1669-3FC4-0326-3524-7812B59E1355}"/>
+                <a16:creationId xmlns:a16="http://schemas.microsoft.com/office/drawing/2014/main" id="{D96C7926-D005-3C2F-670A-DF69BBEA6A5E}"/>
               </a:ext>
             </a:extLst>
           </p:cNvPr>
@@ -5164,7 +5158,7 @@
             <a:hlinkClick r:id="" action="ppaction://media"/>
             <a:extLst>
               <a:ext uri="{FF2B5EF4-FFF2-40B4-BE49-F238E27FC236}">
-                <a16:creationId xmlns:a16="http://schemas.microsoft.com/office/drawing/2014/main" id="{E0DA3F6A-E8C1-4A99-5C9E-A8CB1CB1F1E1}"/>
+                <a16:creationId xmlns:a16="http://schemas.microsoft.com/office/drawing/2014/main" id="{48EE91EC-1F2A-9BF9-E89C-2C67D31EE343}"/>
               </a:ext>
             </a:extLst>
           </p:cNvPr>
@@ -5199,7 +5193,7 @@
     </p:spTree>
     <p:extLst>
       <p:ext uri="{BB962C8B-B14F-4D97-AF65-F5344CB8AC3E}">
-        <p14:creationId xmlns:p14="http://schemas.microsoft.com/office/powerpoint/2010/main" val="3521365671"/>
+        <p14:creationId xmlns:p14="http://schemas.microsoft.com/office/powerpoint/2010/main" val="3981701596"/>
       </p:ext>
     </p:extLst>
   </p:cSld>
@@ -5208,10 +5202,10 @@
   </p:clrMapOvr>
   <mc:AlternateContent xmlns:mc="http://schemas.openxmlformats.org/markup-compatibility/2006">
     <mc:Choice xmlns:p14="http://schemas.microsoft.com/office/powerpoint/2010/main" Requires="p14">
-      <p:transition spd="slow" p14:dur="2000" advTm="6000"/>
+      <p:transition spd="slow" p14:dur="2000" advTm="7000"/>
     </mc:Choice>
     <mc:Fallback>
-      <p:transition spd="slow" advTm="6000"/>
+      <p:transition spd="slow" advTm="7000"/>
     </mc:Fallback>
   </mc:AlternateContent>
   <p:timing>
@@ -5242,7 +5236,7 @@
                                   <p:childTnLst>
                                     <p:cmd type="call" cmd="playFrom(0.0)">
                                       <p:cBhvr>
-                                        <p:cTn id="6" dur="5687" fill="hold"/>
+                                        <p:cTn id="6" dur="6126" fill="hold"/>
                                         <p:tgtEl>
                                           <p:spTgt spid="6"/>
                                         </p:tgtEl>
@@ -5323,7 +5317,7 @@
           <p:cNvPr id="2" name="テキスト ボックス 1">
             <a:extLst>
               <a:ext uri="{FF2B5EF4-FFF2-40B4-BE49-F238E27FC236}">
-                <a16:creationId xmlns:a16="http://schemas.microsoft.com/office/drawing/2014/main" id="{F913E4B7-C83F-71EC-D4B4-8F0185916723}"/>
+                <a16:creationId xmlns:a16="http://schemas.microsoft.com/office/drawing/2014/main" id="{807D2D14-AEBF-1CB3-D14C-CEC5350B4219}"/>
               </a:ext>
             </a:extLst>
           </p:cNvPr>
@@ -5369,7 +5363,7 @@
           <p:cNvPr id="3" name="テキスト ボックス 2">
             <a:extLst>
               <a:ext uri="{FF2B5EF4-FFF2-40B4-BE49-F238E27FC236}">
-                <a16:creationId xmlns:a16="http://schemas.microsoft.com/office/drawing/2014/main" id="{1DCAD08C-CE0E-B68D-8573-6A8CEF2E836B}"/>
+                <a16:creationId xmlns:a16="http://schemas.microsoft.com/office/drawing/2014/main" id="{53C7AFA9-4BD4-D289-1766-4DC0B51A443B}"/>
               </a:ext>
             </a:extLst>
           </p:cNvPr>
@@ -5409,7 +5403,7 @@
           <p:cNvPr id="4" name="テキスト ボックス 3">
             <a:extLst>
               <a:ext uri="{FF2B5EF4-FFF2-40B4-BE49-F238E27FC236}">
-                <a16:creationId xmlns:a16="http://schemas.microsoft.com/office/drawing/2014/main" id="{B26A33AE-16F4-282D-A601-5D2592E8C7C0}"/>
+                <a16:creationId xmlns:a16="http://schemas.microsoft.com/office/drawing/2014/main" id="{207E7CEA-459C-D36D-CA6F-C0CBB41FD608}"/>
               </a:ext>
             </a:extLst>
           </p:cNvPr>
@@ -5474,7 +5468,7 @@
           <p:cNvPr id="5" name="テキスト ボックス 4">
             <a:extLst>
               <a:ext uri="{FF2B5EF4-FFF2-40B4-BE49-F238E27FC236}">
-                <a16:creationId xmlns:a16="http://schemas.microsoft.com/office/drawing/2014/main" id="{1FC91C84-B183-59BF-D0BD-8CD9C907F1DD}"/>
+                <a16:creationId xmlns:a16="http://schemas.microsoft.com/office/drawing/2014/main" id="{C5AE1802-4E48-B29F-56D0-BEFB060EE037}"/>
               </a:ext>
             </a:extLst>
           </p:cNvPr>
@@ -5521,7 +5515,7 @@
             <a:hlinkClick r:id="" action="ppaction://media"/>
             <a:extLst>
               <a:ext uri="{FF2B5EF4-FFF2-40B4-BE49-F238E27FC236}">
-                <a16:creationId xmlns:a16="http://schemas.microsoft.com/office/drawing/2014/main" id="{18E40290-C950-59AD-9E59-A11A0BDB5399}"/>
+                <a16:creationId xmlns:a16="http://schemas.microsoft.com/office/drawing/2014/main" id="{1B40BEE9-66A6-ADE8-8BDE-D3057EF6A87E}"/>
               </a:ext>
             </a:extLst>
           </p:cNvPr>
@@ -5556,7 +5550,7 @@
     </p:spTree>
     <p:extLst>
       <p:ext uri="{BB962C8B-B14F-4D97-AF65-F5344CB8AC3E}">
-        <p14:creationId xmlns:p14="http://schemas.microsoft.com/office/powerpoint/2010/main" val="2074456708"/>
+        <p14:creationId xmlns:p14="http://schemas.microsoft.com/office/powerpoint/2010/main" val="690671272"/>
       </p:ext>
     </p:extLst>
   </p:cSld>
